--- a/Reporte 170826.pptx
+++ b/Reporte 170826.pptx
@@ -6420,7 +6420,7 @@
                 <a:latin typeface="Montserrat Black"/>
                 <a:sym typeface="Arial"/>
               </a:rPr>
-              <a:t>Elaborado: 14</a:t>
+              <a:t>Elaborado: 17</a:t>
             </a:r>
             <a:r>
               <a:rPr lang="es-MX" sz="1600" dirty="0">
@@ -7376,10 +7376,10 @@
       </p:sp>
       <p:pic>
         <p:nvPicPr>
-          <p:cNvPr id="3" name="Imagen 2">
+          <p:cNvPr id="4" name="Imagen 3">
             <a:extLst>
               <a:ext uri="{FF2B5EF4-FFF2-40B4-BE49-F238E27FC236}">
-                <a16:creationId xmlns:a16="http://schemas.microsoft.com/office/drawing/2014/main" id="{FE491FB3-5A2D-D429-E608-CE5A06AD3A07}"/>
+                <a16:creationId xmlns:a16="http://schemas.microsoft.com/office/drawing/2014/main" id="{11F137E2-06CC-A23B-C739-52D5CBCEBA21}"/>
               </a:ext>
             </a:extLst>
           </p:cNvPr>
@@ -7396,8 +7396,8 @@
         </p:blipFill>
         <p:spPr>
           <a:xfrm>
-            <a:off x="-36512" y="929619"/>
-            <a:ext cx="9144000" cy="3427137"/>
+            <a:off x="0" y="947841"/>
+            <a:ext cx="9144000" cy="3390694"/>
           </a:xfrm>
           <a:prstGeom prst="rect">
             <a:avLst/>
@@ -7490,10 +7490,10 @@
       </p:sp>
       <p:pic>
         <p:nvPicPr>
-          <p:cNvPr id="4" name="Imagen 3">
+          <p:cNvPr id="6" name="Imagen 5">
             <a:extLst>
               <a:ext uri="{FF2B5EF4-FFF2-40B4-BE49-F238E27FC236}">
-                <a16:creationId xmlns:a16="http://schemas.microsoft.com/office/drawing/2014/main" id="{7B060FFE-2014-7E7D-11B7-788F7F0D28DD}"/>
+                <a16:creationId xmlns:a16="http://schemas.microsoft.com/office/drawing/2014/main" id="{378FC8FA-B0C8-D611-F836-EE7503A7AAF8}"/>
               </a:ext>
             </a:extLst>
           </p:cNvPr>
@@ -7510,8 +7510,8 @@
         </p:blipFill>
         <p:spPr>
           <a:xfrm>
-            <a:off x="0" y="1422496"/>
-            <a:ext cx="9144000" cy="2441383"/>
+            <a:off x="0" y="1413889"/>
+            <a:ext cx="9144000" cy="2458598"/>
           </a:xfrm>
           <a:prstGeom prst="rect">
             <a:avLst/>
@@ -7604,10 +7604,10 @@
       </p:sp>
       <p:pic>
         <p:nvPicPr>
-          <p:cNvPr id="3" name="Imagen 2">
+          <p:cNvPr id="2" name="Imagen 1">
             <a:extLst>
               <a:ext uri="{FF2B5EF4-FFF2-40B4-BE49-F238E27FC236}">
-                <a16:creationId xmlns:a16="http://schemas.microsoft.com/office/drawing/2014/main" id="{905A78A1-1B48-401F-E1A2-D01FA96E34D0}"/>
+                <a16:creationId xmlns:a16="http://schemas.microsoft.com/office/drawing/2014/main" id="{07D08A58-055D-83F5-A37C-A4E7A69EA015}"/>
               </a:ext>
             </a:extLst>
           </p:cNvPr>
@@ -7624,8 +7624,8 @@
         </p:blipFill>
         <p:spPr>
           <a:xfrm>
-            <a:off x="560314" y="639664"/>
-            <a:ext cx="7950347" cy="4007048"/>
+            <a:off x="1106488" y="914940"/>
+            <a:ext cx="6858000" cy="3456495"/>
           </a:xfrm>
           <a:prstGeom prst="rect">
             <a:avLst/>
@@ -7714,10 +7714,10 @@
       </p:sp>
       <p:pic>
         <p:nvPicPr>
-          <p:cNvPr id="3" name="Imagen 2">
+          <p:cNvPr id="4" name="Imagen 3">
             <a:extLst>
               <a:ext uri="{FF2B5EF4-FFF2-40B4-BE49-F238E27FC236}">
-                <a16:creationId xmlns:a16="http://schemas.microsoft.com/office/drawing/2014/main" id="{88528215-3D9E-1EE7-FB86-9C0C74A4D0BC}"/>
+                <a16:creationId xmlns:a16="http://schemas.microsoft.com/office/drawing/2014/main" id="{869F472D-D6DE-B83E-A4B5-C9098199A45E}"/>
               </a:ext>
             </a:extLst>
           </p:cNvPr>
@@ -7734,8 +7734,8 @@
         </p:blipFill>
         <p:spPr>
           <a:xfrm>
-            <a:off x="1969283" y="707587"/>
-            <a:ext cx="5132408" cy="3871202"/>
+            <a:off x="520139" y="1180896"/>
+            <a:ext cx="8030696" cy="2924583"/>
           </a:xfrm>
           <a:prstGeom prst="rect">
             <a:avLst/>
@@ -7828,10 +7828,10 @@
       </p:sp>
       <p:pic>
         <p:nvPicPr>
-          <p:cNvPr id="3" name="Imagen 2">
+          <p:cNvPr id="9" name="Imagen 8">
             <a:extLst>
               <a:ext uri="{FF2B5EF4-FFF2-40B4-BE49-F238E27FC236}">
-                <a16:creationId xmlns:a16="http://schemas.microsoft.com/office/drawing/2014/main" id="{E281D56F-57D3-FD3B-B949-2CD757D901AE}"/>
+                <a16:creationId xmlns:a16="http://schemas.microsoft.com/office/drawing/2014/main" id="{D986BD78-D11D-77B5-8845-BF9D3302CBE4}"/>
               </a:ext>
             </a:extLst>
           </p:cNvPr>
@@ -7848,8 +7848,8 @@
         </p:blipFill>
         <p:spPr>
           <a:xfrm>
-            <a:off x="0" y="1480658"/>
-            <a:ext cx="9144000" cy="2441383"/>
+            <a:off x="0" y="988623"/>
+            <a:ext cx="9144000" cy="3411054"/>
           </a:xfrm>
           <a:prstGeom prst="rect">
             <a:avLst/>
@@ -7942,10 +7942,10 @@
       </p:sp>
       <p:pic>
         <p:nvPicPr>
-          <p:cNvPr id="2" name="Imagen 1">
+          <p:cNvPr id="3" name="Imagen 2">
             <a:extLst>
               <a:ext uri="{FF2B5EF4-FFF2-40B4-BE49-F238E27FC236}">
-                <a16:creationId xmlns:a16="http://schemas.microsoft.com/office/drawing/2014/main" id="{9C1CCAA9-301C-8B36-8E65-297723B1C05C}"/>
+                <a16:creationId xmlns:a16="http://schemas.microsoft.com/office/drawing/2014/main" id="{2708BF77-28C6-DCE6-69AB-59153B77A1A3}"/>
               </a:ext>
             </a:extLst>
           </p:cNvPr>
@@ -7962,7 +7962,7 @@
         </p:blipFill>
         <p:spPr>
           <a:xfrm>
-            <a:off x="1143000" y="914940"/>
+            <a:off x="1106488" y="914940"/>
             <a:ext cx="6858000" cy="3456495"/>
           </a:xfrm>
           <a:prstGeom prst="rect">
@@ -8056,10 +8056,10 @@
       </p:sp>
       <p:pic>
         <p:nvPicPr>
-          <p:cNvPr id="2" name="Imagen 1">
+          <p:cNvPr id="3" name="Imagen 2">
             <a:extLst>
               <a:ext uri="{FF2B5EF4-FFF2-40B4-BE49-F238E27FC236}">
-                <a16:creationId xmlns:a16="http://schemas.microsoft.com/office/drawing/2014/main" id="{112FEE0C-77F0-AE11-E4A8-C891897998F1}"/>
+                <a16:creationId xmlns:a16="http://schemas.microsoft.com/office/drawing/2014/main" id="{DAC7DEA0-F7A5-2874-B3C3-A1FEEE8D320D}"/>
               </a:ext>
             </a:extLst>
           </p:cNvPr>
@@ -8174,10 +8174,10 @@
       </p:sp>
       <p:pic>
         <p:nvPicPr>
-          <p:cNvPr id="5" name="Imagen 4">
+          <p:cNvPr id="3" name="Imagen 2">
             <a:extLst>
               <a:ext uri="{FF2B5EF4-FFF2-40B4-BE49-F238E27FC236}">
-                <a16:creationId xmlns:a16="http://schemas.microsoft.com/office/drawing/2014/main" id="{043F8905-0C13-0CEC-1F04-79293DCEF416}"/>
+                <a16:creationId xmlns:a16="http://schemas.microsoft.com/office/drawing/2014/main" id="{183C01EE-6710-DFBF-FCA7-1CA1806C5609}"/>
               </a:ext>
             </a:extLst>
           </p:cNvPr>
@@ -8194,8 +8194,8 @@
         </p:blipFill>
         <p:spPr>
           <a:xfrm>
-            <a:off x="1957022" y="1509564"/>
-            <a:ext cx="5229955" cy="2124371"/>
+            <a:off x="2558773" y="1695318"/>
+            <a:ext cx="3953427" cy="1895740"/>
           </a:xfrm>
           <a:prstGeom prst="rect">
             <a:avLst/>

--- a/Reporte 170826.pptx
+++ b/Reporte 170826.pptx
@@ -5,7 +5,7 @@
     <p:sldMasterId id="2147483672" r:id="rId1"/>
   </p:sldMasterIdLst>
   <p:notesMasterIdLst>
-    <p:notesMasterId r:id="rId19"/>
+    <p:notesMasterId r:id="rId18"/>
   </p:notesMasterIdLst>
   <p:sldIdLst>
     <p:sldId id="350" r:id="rId2"/>
@@ -22,24 +22,23 @@
     <p:sldId id="361" r:id="rId13"/>
     <p:sldId id="412" r:id="rId14"/>
     <p:sldId id="371" r:id="rId15"/>
-    <p:sldId id="410" r:id="rId16"/>
-    <p:sldId id="413" r:id="rId17"/>
-    <p:sldId id="280" r:id="rId18"/>
+    <p:sldId id="413" r:id="rId16"/>
+    <p:sldId id="280" r:id="rId17"/>
   </p:sldIdLst>
   <p:sldSz cx="9144000" cy="5143500" type="screen16x9"/>
   <p:notesSz cx="6858000" cy="9144000"/>
   <p:embeddedFontLst>
     <p:embeddedFont>
       <p:font typeface="Montserrat" panose="00000500000000000000" pitchFamily="2" charset="0"/>
-      <p:regular r:id="rId20"/>
-      <p:bold r:id="rId21"/>
-      <p:italic r:id="rId22"/>
-      <p:boldItalic r:id="rId23"/>
+      <p:regular r:id="rId19"/>
+      <p:bold r:id="rId20"/>
+      <p:italic r:id="rId21"/>
+      <p:boldItalic r:id="rId22"/>
     </p:embeddedFont>
     <p:embeddedFont>
       <p:font typeface="Montserrat Black" panose="00000A00000000000000" pitchFamily="2" charset="0"/>
-      <p:bold r:id="rId24"/>
-      <p:boldItalic r:id="rId25"/>
+      <p:bold r:id="rId23"/>
+      <p:boldItalic r:id="rId24"/>
     </p:embeddedFont>
   </p:embeddedFontLst>
   <p:defaultTextStyle>
@@ -6554,10 +6553,10 @@
       </p:sp>
       <p:pic>
         <p:nvPicPr>
-          <p:cNvPr id="5" name="Imagen 4">
+          <p:cNvPr id="4" name="Imagen 3">
             <a:extLst>
               <a:ext uri="{FF2B5EF4-FFF2-40B4-BE49-F238E27FC236}">
-                <a16:creationId xmlns:a16="http://schemas.microsoft.com/office/drawing/2014/main" id="{7C3DDA17-C1DA-C6CB-E8E0-6F9F21DE4AF6}"/>
+                <a16:creationId xmlns:a16="http://schemas.microsoft.com/office/drawing/2014/main" id="{3664A018-02F0-50CF-724E-DF59DFB4D037}"/>
               </a:ext>
             </a:extLst>
           </p:cNvPr>
@@ -6574,8 +6573,8 @@
         </p:blipFill>
         <p:spPr>
           <a:xfrm>
-            <a:off x="0" y="841104"/>
-            <a:ext cx="9144000" cy="3604168"/>
+            <a:off x="-36512" y="857329"/>
+            <a:ext cx="9144000" cy="3571717"/>
           </a:xfrm>
           <a:prstGeom prst="rect">
             <a:avLst/>
@@ -6660,10 +6659,10 @@
       </p:sp>
       <p:pic>
         <p:nvPicPr>
-          <p:cNvPr id="4" name="Imagen 3">
+          <p:cNvPr id="3" name="Imagen 2">
             <a:extLst>
               <a:ext uri="{FF2B5EF4-FFF2-40B4-BE49-F238E27FC236}">
-                <a16:creationId xmlns:a16="http://schemas.microsoft.com/office/drawing/2014/main" id="{AAF90928-95C3-C54E-F73A-F870EE2F5568}"/>
+                <a16:creationId xmlns:a16="http://schemas.microsoft.com/office/drawing/2014/main" id="{C4A05A1E-8172-6E63-66C4-D8ACC47E8191}"/>
               </a:ext>
             </a:extLst>
           </p:cNvPr>
@@ -6680,8 +6679,8 @@
         </p:blipFill>
         <p:spPr>
           <a:xfrm>
-            <a:off x="0" y="841104"/>
-            <a:ext cx="9144000" cy="3604168"/>
+            <a:off x="0" y="1341244"/>
+            <a:ext cx="9144000" cy="2603887"/>
           </a:xfrm>
           <a:prstGeom prst="rect">
             <a:avLst/>
@@ -6766,10 +6765,10 @@
       </p:sp>
       <p:pic>
         <p:nvPicPr>
-          <p:cNvPr id="4" name="Imagen 3">
+          <p:cNvPr id="5" name="Imagen 4">
             <a:extLst>
               <a:ext uri="{FF2B5EF4-FFF2-40B4-BE49-F238E27FC236}">
-                <a16:creationId xmlns:a16="http://schemas.microsoft.com/office/drawing/2014/main" id="{E848727C-CF19-E96D-C4B7-BA961417802F}"/>
+                <a16:creationId xmlns:a16="http://schemas.microsoft.com/office/drawing/2014/main" id="{CB33C39C-103B-E27A-BC97-7A947C712367}"/>
               </a:ext>
             </a:extLst>
           </p:cNvPr>
@@ -6786,8 +6785,8 @@
         </p:blipFill>
         <p:spPr>
           <a:xfrm>
-            <a:off x="0" y="1020682"/>
-            <a:ext cx="9144000" cy="3245012"/>
+            <a:off x="0" y="792926"/>
+            <a:ext cx="9144000" cy="3700523"/>
           </a:xfrm>
           <a:prstGeom prst="rect">
             <a:avLst/>
@@ -6872,10 +6871,10 @@
       </p:sp>
       <p:pic>
         <p:nvPicPr>
-          <p:cNvPr id="4" name="Imagen 3">
+          <p:cNvPr id="3" name="Imagen 2">
             <a:extLst>
               <a:ext uri="{FF2B5EF4-FFF2-40B4-BE49-F238E27FC236}">
-                <a16:creationId xmlns:a16="http://schemas.microsoft.com/office/drawing/2014/main" id="{4450A66D-F091-9D70-AB6C-C3677C4E3FFA}"/>
+                <a16:creationId xmlns:a16="http://schemas.microsoft.com/office/drawing/2014/main" id="{B22FB522-49A8-FC0D-2A0D-A006B14789C3}"/>
               </a:ext>
             </a:extLst>
           </p:cNvPr>
@@ -6892,8 +6891,8 @@
         </p:blipFill>
         <p:spPr>
           <a:xfrm>
-            <a:off x="0" y="1278185"/>
-            <a:ext cx="9144000" cy="2730006"/>
+            <a:off x="0" y="1252813"/>
+            <a:ext cx="9144000" cy="2780750"/>
           </a:xfrm>
           <a:prstGeom prst="rect">
             <a:avLst/>
@@ -6978,10 +6977,10 @@
       </p:sp>
       <p:pic>
         <p:nvPicPr>
-          <p:cNvPr id="9" name="Imagen 8">
+          <p:cNvPr id="3" name="Imagen 2">
             <a:extLst>
               <a:ext uri="{FF2B5EF4-FFF2-40B4-BE49-F238E27FC236}">
-                <a16:creationId xmlns:a16="http://schemas.microsoft.com/office/drawing/2014/main" id="{9C897E75-405E-F19A-E9C6-92BB30DA8BB8}"/>
+                <a16:creationId xmlns:a16="http://schemas.microsoft.com/office/drawing/2014/main" id="{F56DD75F-9EC2-1D20-00D7-F0CD70F040E6}"/>
               </a:ext>
             </a:extLst>
           </p:cNvPr>
@@ -6998,8 +6997,8 @@
         </p:blipFill>
         <p:spPr>
           <a:xfrm>
-            <a:off x="0" y="592884"/>
-            <a:ext cx="9144000" cy="4100608"/>
+            <a:off x="0" y="689169"/>
+            <a:ext cx="9144000" cy="3908037"/>
           </a:xfrm>
           <a:prstGeom prst="rect">
             <a:avLst/>
@@ -7020,118 +7019,6 @@
 </file>
 
 <file path=ppt/slides/slide15.xml><?xml version="1.0" encoding="utf-8"?>
-<p:sld xmlns:a="http://schemas.openxmlformats.org/drawingml/2006/main" xmlns:r="http://schemas.openxmlformats.org/officeDocument/2006/relationships" xmlns:p="http://schemas.openxmlformats.org/presentationml/2006/main">
-  <p:cSld>
-    <p:bg>
-      <p:bgPr>
-        <a:solidFill>
-          <a:srgbClr val="F8F9FA"/>
-        </a:solidFill>
-        <a:effectLst/>
-      </p:bgPr>
-    </p:bg>
-    <p:spTree>
-      <p:nvGrpSpPr>
-        <p:cNvPr id="1" name="">
-          <a:extLst>
-            <a:ext uri="{FF2B5EF4-FFF2-40B4-BE49-F238E27FC236}">
-              <a16:creationId xmlns:a16="http://schemas.microsoft.com/office/drawing/2014/main" id="{D9F2AF5B-2834-1C0B-9725-5773781D8F3D}"/>
-            </a:ext>
-          </a:extLst>
-        </p:cNvPr>
-        <p:cNvGrpSpPr/>
-        <p:nvPr/>
-      </p:nvGrpSpPr>
-      <p:grpSpPr>
-        <a:xfrm>
-          <a:off x="0" y="0"/>
-          <a:ext cx="0" cy="0"/>
-          <a:chOff x="0" y="0"/>
-          <a:chExt cx="0" cy="0"/>
-        </a:xfrm>
-      </p:grpSpPr>
-      <p:sp>
-        <p:nvSpPr>
-          <p:cNvPr id="5" name="CuadroTexto 4">
-            <a:extLst>
-              <a:ext uri="{FF2B5EF4-FFF2-40B4-BE49-F238E27FC236}">
-                <a16:creationId xmlns:a16="http://schemas.microsoft.com/office/drawing/2014/main" id="{E338F291-9C8E-D1F6-530E-8861F8F8369D}"/>
-              </a:ext>
-            </a:extLst>
-          </p:cNvPr>
-          <p:cNvSpPr txBox="1"/>
-          <p:nvPr/>
-        </p:nvSpPr>
-        <p:spPr>
-          <a:xfrm>
-            <a:off x="1926166" y="88135"/>
-            <a:ext cx="5291667" cy="307777"/>
-          </a:xfrm>
-          <a:prstGeom prst="rect">
-            <a:avLst/>
-          </a:prstGeom>
-          <a:noFill/>
-        </p:spPr>
-        <p:txBody>
-          <a:bodyPr wrap="square" rtlCol="0">
-            <a:spAutoFit/>
-          </a:bodyPr>
-          <a:lstStyle/>
-          <a:p>
-            <a:pPr algn="ctr"/>
-            <a:r>
-              <a:rPr lang="es-MX" b="1" dirty="0">
-                <a:latin typeface="Montserrat" pitchFamily="2" charset="0"/>
-              </a:rPr>
-              <a:t>Opinión emitida por radioescuchas</a:t>
-            </a:r>
-          </a:p>
-        </p:txBody>
-      </p:sp>
-      <p:pic>
-        <p:nvPicPr>
-          <p:cNvPr id="3" name="Imagen 2">
-            <a:extLst>
-              <a:ext uri="{FF2B5EF4-FFF2-40B4-BE49-F238E27FC236}">
-                <a16:creationId xmlns:a16="http://schemas.microsoft.com/office/drawing/2014/main" id="{5AF03177-6A88-D824-6CEC-940BAF8DA538}"/>
-              </a:ext>
-            </a:extLst>
-          </p:cNvPr>
-          <p:cNvPicPr>
-            <a:picLocks noChangeAspect="1"/>
-          </p:cNvPicPr>
-          <p:nvPr/>
-        </p:nvPicPr>
-        <p:blipFill>
-          <a:blip r:embed="rId2"/>
-          <a:stretch>
-            <a:fillRect/>
-          </a:stretch>
-        </p:blipFill>
-        <p:spPr>
-          <a:xfrm>
-            <a:off x="2671761" y="1119188"/>
-            <a:ext cx="3800475" cy="3048000"/>
-          </a:xfrm>
-          <a:prstGeom prst="rect">
-            <a:avLst/>
-          </a:prstGeom>
-        </p:spPr>
-      </p:pic>
-    </p:spTree>
-    <p:extLst>
-      <p:ext uri="{BB962C8B-B14F-4D97-AF65-F5344CB8AC3E}">
-        <p14:creationId xmlns:p14="http://schemas.microsoft.com/office/powerpoint/2010/main" val="1066518924"/>
-      </p:ext>
-    </p:extLst>
-  </p:cSld>
-  <p:clrMapOvr>
-    <a:masterClrMapping/>
-  </p:clrMapOvr>
-</p:sld>
-</file>
-
-<file path=ppt/slides/slide16.xml><?xml version="1.0" encoding="utf-8"?>
 <p:sld xmlns:a="http://schemas.openxmlformats.org/drawingml/2006/main" xmlns:r="http://schemas.openxmlformats.org/officeDocument/2006/relationships" xmlns:p="http://schemas.openxmlformats.org/presentationml/2006/main">
   <p:cSld>
     <p:bg>
@@ -7202,10 +7089,10 @@
       </p:sp>
       <p:pic>
         <p:nvPicPr>
-          <p:cNvPr id="3" name="Imagen 2">
+          <p:cNvPr id="4" name="Imagen 3">
             <a:extLst>
               <a:ext uri="{FF2B5EF4-FFF2-40B4-BE49-F238E27FC236}">
-                <a16:creationId xmlns:a16="http://schemas.microsoft.com/office/drawing/2014/main" id="{CCA33EAF-4258-A1CC-18C8-6CCBB852B5AA}"/>
+                <a16:creationId xmlns:a16="http://schemas.microsoft.com/office/drawing/2014/main" id="{93E82866-BB63-562A-D7EB-5F6A97059136}"/>
               </a:ext>
             </a:extLst>
           </p:cNvPr>
@@ -7222,8 +7109,8 @@
         </p:blipFill>
         <p:spPr>
           <a:xfrm>
-            <a:off x="758298" y="1252344"/>
-            <a:ext cx="7554379" cy="2781688"/>
+            <a:off x="0" y="594101"/>
+            <a:ext cx="9144000" cy="4214498"/>
           </a:xfrm>
           <a:prstGeom prst="rect">
             <a:avLst/>
@@ -7243,7 +7130,7 @@
 </p:sld>
 </file>
 
-<file path=ppt/slides/slide17.xml><?xml version="1.0" encoding="utf-8"?>
+<file path=ppt/slides/slide16.xml><?xml version="1.0" encoding="utf-8"?>
 <p:sld xmlns:a="http://schemas.openxmlformats.org/drawingml/2006/main" xmlns:r="http://schemas.openxmlformats.org/officeDocument/2006/relationships" xmlns:p="http://schemas.openxmlformats.org/presentationml/2006/main">
   <p:cSld>
     <p:spTree>
